--- a/backend/knowledge_base/templates/sample/slides.pptx
+++ b/backend/knowledge_base/templates/sample/slides.pptx
@@ -295,14 +295,14 @@
         </p:nvSpPr>
         <p:spPr>
           <a:xfrm>
-            <a:off x="822960" y="640080"/>
-            <a:ext cx="1188720" cy="566928"/>
+            <a:off x="822960" y="548640"/>
+            <a:ext cx="2011680" cy="731520"/>
           </a:xfrm>
           <a:prstGeom prst="roundRect">
             <a:avLst/>
           </a:prstGeom>
           <a:solidFill>
-            <a:srgbClr val="0B5CAD"/>
+            <a:srgbClr val="FFFFFF"/>
           </a:solidFill>
           <a:ln>
             <a:noFill/>
@@ -331,10 +331,10 @@
             <a:r>
               <a:rPr sz="1600" b="1">
                 <a:solidFill>
-                  <a:srgbClr val="FFFFFF"/>
+                  <a:srgbClr val="0F1B3D"/>
                 </a:solidFill>
               </a:rPr>
-              <a:t>{{company_short}}</a:t>
+              <a:t>{{company_logo}}</a:t>
             </a:r>
           </a:p>
         </p:txBody>
@@ -2947,17 +2947,19 @@
         </p:nvSpPr>
         <p:spPr>
           <a:xfrm>
-            <a:off x="10744200" y="384048"/>
-            <a:ext cx="1005840" cy="548640"/>
+            <a:off x="10561320" y="384048"/>
+            <a:ext cx="1188720" cy="548640"/>
           </a:xfrm>
           <a:prstGeom prst="roundRect">
             <a:avLst/>
           </a:prstGeom>
           <a:solidFill>
-            <a:srgbClr val="0F1B3D"/>
+            <a:srgbClr val="FFFFFF"/>
           </a:solidFill>
           <a:ln>
-            <a:noFill/>
+            <a:solidFill>
+              <a:srgbClr val="D1D5DB"/>
+            </a:solidFill>
           </a:ln>
           <a:effectLst/>
         </p:spPr>
@@ -2983,10 +2985,10 @@
             <a:r>
               <a:rPr sz="1400" b="1">
                 <a:solidFill>
-                  <a:srgbClr val="FFFFFF"/>
+                  <a:srgbClr val="0F1B3D"/>
                 </a:solidFill>
               </a:rPr>
-              <a:t>{{company_short}}</a:t>
+              <a:t>{{company_logo}}</a:t>
             </a:r>
           </a:p>
         </p:txBody>
